--- a/docs/grant-deck-2026-09-11.pptx
+++ b/docs/grant-deck-2026-09-11.pptx
@@ -3224,8 +3224,8 @@
                 </a:solidFill>
                 <a:latin typeface="Calibri"/>
               </a:rPr>
-              <a:t>Service a residential mortgage for thirty years.
-Prove every dollar on the XRP Ledger.</a:t>
+              <a:t>Tokenize the note. Service it for thirty years.
+Prove every payment on the XRP Ledger.</a:t>
             </a:r>
           </a:p>
         </p:txBody>
@@ -3272,7 +3272,7 @@
                 </a:solidFill>
                 <a:latin typeface="Calibri"/>
               </a:rPr>
-              <a:t>High Tech Mortgage, Inc. · Sacramento, California · Metro Manila, Philippines · v3.0.0 live on Testnet</a:t>
+              <a:t>High Tech Mortgage, Inc. · Sacramento, California · Metro Manila, Philippines · v3.1 live on Testnet</a:t>
             </a:r>
           </a:p>
         </p:txBody>
@@ -3483,7 +3483,7 @@
                 </a:solidFill>
                 <a:latin typeface="Calibri"/>
               </a:rPr>
-              <a:t>High Tech Mortgage, Inc. · MortgageOS™ servicing layer v3.0.0 · XRPL Grants proposal · September 11, 2026 · github.com/vanfwilson/xrpl-mortgage-tokenizing-htm</a:t>
+              <a:t>High Tech Mortgage, Inc. · MortgageOS™ tokenization + servicing layer v3.1 · XRPL Grants proposal · September 11, 2026 · github.com/vanfwilson/xrpl-mortgage-tokenizing-htm</a:t>
             </a:r>
           </a:p>
         </p:txBody>
@@ -3554,7 +3554,7 @@
                 </a:solidFill>
                 <a:latin typeface="Calibri"/>
               </a:rPr>
-              <a:t>•  No capital raising, no investors, no interests in loans sold. The record of account cannot be transferred.</a:t>
+              <a:t>•  No capital raising and no sale of interests to the public. The note asset moves only between authorized institutions; the borrower's obligation is untouched by it.</a:t>
             </a:r>
           </a:p>
           <a:p>
@@ -4009,7 +4009,7 @@
                 </a:solidFill>
                 <a:latin typeface="Calibri"/>
               </a:rPr>
-              <a:t>High Tech Mortgage, Inc. · MortgageOS™ servicing layer v3.0.0 · XRPL Grants proposal · September 11, 2026 · github.com/vanfwilson/xrpl-mortgage-tokenizing-htm</a:t>
+              <a:t>High Tech Mortgage, Inc. · MortgageOS™ tokenization + servicing layer v3.1 · XRPL Grants proposal · September 11, 2026 · github.com/vanfwilson/xrpl-mortgage-tokenizing-htm</a:t>
             </a:r>
           </a:p>
         </p:txBody>
@@ -4968,7 +4968,7 @@
                 </a:solidFill>
                 <a:latin typeface="Calibri"/>
               </a:rPr>
-              <a:t>High Tech Mortgage, Inc. · MortgageOS™ servicing layer v3.0.0 · XRPL Grants proposal · September 11, 2026 · github.com/vanfwilson/xrpl-mortgage-tokenizing-htm</a:t>
+              <a:t>High Tech Mortgage, Inc. · MortgageOS™ tokenization + servicing layer v3.1 · XRPL Grants proposal · September 11, 2026 · github.com/vanfwilson/xrpl-mortgage-tokenizing-htm</a:t>
             </a:r>
           </a:p>
         </p:txBody>
@@ -5956,7 +5956,7 @@
                 </a:solidFill>
                 <a:latin typeface="Calibri"/>
               </a:rPr>
-              <a:t>High Tech Mortgage, Inc. · MortgageOS™ servicing layer v3.0.0 · XRPL Grants proposal · September 11, 2026 · github.com/vanfwilson/xrpl-mortgage-tokenizing-htm</a:t>
+              <a:t>High Tech Mortgage, Inc. · MortgageOS™ tokenization + servicing layer v3.1 · XRPL Grants proposal · September 11, 2026 · github.com/vanfwilson/xrpl-mortgage-tokenizing-htm</a:t>
             </a:r>
           </a:p>
         </p:txBody>
@@ -5996,6 +5996,38 @@
                 <a:latin typeface="Calibri"/>
               </a:rPr>
               <a:t>•  No bank has signed a servicing contract yet; the operating assumptions are ours.</a:t>
+            </a:r>
+          </a:p>
+          <a:p>
+            <a:pPr>
+              <a:spcAft>
+                <a:spcPts val="600"/>
+              </a:spcAft>
+            </a:pPr>
+            <a:r>
+              <a:rPr sz="1400">
+                <a:solidFill>
+                  <a:srgbClr val="0B2545"/>
+                </a:solidFill>
+                <a:latin typeface="Calibri"/>
+              </a:rPr>
+              <a:t>•  Counsel has not yet characterized the note asset (UCC 3/9 negotiability and perfection, eNote / ESIGN / UETA / MERS, securities); until then it stays RequireAuth with only the originating lender authorized.</a:t>
+            </a:r>
+          </a:p>
+          <a:p>
+            <a:pPr>
+              <a:spcAft>
+                <a:spcPts val="600"/>
+              </a:spcAft>
+            </a:pPr>
+            <a:r>
+              <a:rPr sz="1400">
+                <a:solidFill>
+                  <a:srgbClr val="0B2545"/>
+                </a:solidFill>
+                <a:latin typeface="Calibri"/>
+              </a:rPr>
+              <a:t>•  XLS-65 / XLS-66 are on Devnet only; vault deposit and collateral use are a readiness study (M6), not a feature. Funding 30-year notes with short-term liabilities is the bank's asset-liability decision.</a:t>
             </a:r>
           </a:p>
           <a:p>
@@ -6302,7 +6334,7 @@
                 </a:solidFill>
                 <a:latin typeface="Calibri"/>
               </a:rPr>
-              <a:t>High Tech Mortgage, Inc. · MortgageOS™ servicing layer v3.0.0 · XRPL Grants proposal · September 11, 2026 · github.com/vanfwilson/xrpl-mortgage-tokenizing-htm</a:t>
+              <a:t>High Tech Mortgage, Inc. · MortgageOS™ tokenization + servicing layer v3.1 · XRPL Grants proposal · September 11, 2026 · github.com/vanfwilson/xrpl-mortgage-tokenizing-htm</a:t>
             </a:r>
           </a:p>
         </p:txBody>
@@ -7413,7 +7445,7 @@
                 </a:solidFill>
                 <a:latin typeface="Calibri"/>
               </a:rPr>
-              <a:t>High Tech Mortgage, Inc. · MortgageOS™ servicing layer v3.0.0 · XRPL Grants proposal · September 11, 2026 · github.com/vanfwilson/xrpl-mortgage-tokenizing-htm</a:t>
+              <a:t>High Tech Mortgage, Inc. · MortgageOS™ tokenization + servicing layer v3.1 · XRPL Grants proposal · September 11, 2026 · github.com/vanfwilson/xrpl-mortgage-tokenizing-htm</a:t>
             </a:r>
           </a:p>
         </p:txBody>
@@ -7503,7 +7535,7 @@
                 </a:solidFill>
                 <a:latin typeface="Calibri"/>
               </a:rPr>
-              <a:t>•  Everything stays open source: the mortgageos schema, the record-of-account MPT pattern, the memo format, the transaction builders, the audit-log contract.</a:t>
+              <a:t>•  Everything stays open source: the mortgageos schema, the note-asset MPT pattern and metadata, the memo format, the transaction builders, the payment-proof and audit-log contract, the Hook firewall.</a:t>
             </a:r>
           </a:p>
           <a:p>
@@ -7809,7 +7841,7 @@
                 </a:solidFill>
                 <a:latin typeface="Calibri"/>
               </a:rPr>
-              <a:t>High Tech Mortgage, Inc. · MortgageOS™ servicing layer v3.0.0 · XRPL Grants proposal · September 11, 2026 · github.com/vanfwilson/xrpl-mortgage-tokenizing-htm</a:t>
+              <a:t>High Tech Mortgage, Inc. · MortgageOS™ tokenization + servicing layer v3.1 · XRPL Grants proposal · September 11, 2026 · github.com/vanfwilson/xrpl-mortgage-tokenizing-htm</a:t>
             </a:r>
           </a:p>
         </p:txBody>
@@ -8191,7 +8223,7 @@
                 </a:solidFill>
                 <a:latin typeface="Calibri"/>
               </a:rPr>
-              <a:t>What we built: MortgageOS™ servicing layer v3.0.0 (open source, MIT)</a:t>
+              <a:t>What we built: MortgageOS™ tokenization + servicing layer v3.1 (open source, MIT)</a:t>
             </a:r>
           </a:p>
         </p:txBody>
@@ -8305,7 +8337,7 @@
                 </a:solidFill>
                 <a:latin typeface="Calibri"/>
               </a:rPr>
-              <a:t>High Tech Mortgage, Inc. · MortgageOS™ servicing layer v3.0.0 · XRPL Grants proposal · September 11, 2026 · github.com/vanfwilson/xrpl-mortgage-tokenizing-htm</a:t>
+              <a:t>High Tech Mortgage, Inc. · MortgageOS™ tokenization + servicing layer v3.1 · XRPL Grants proposal · September 11, 2026 · github.com/vanfwilson/xrpl-mortgage-tokenizing-htm</a:t>
             </a:r>
           </a:p>
         </p:txBody>
@@ -8428,7 +8460,7 @@
                 </a:solidFill>
                 <a:latin typeface="Calibri"/>
               </a:rPr>
-              <a:t>Record of account</a:t>
+              <a:t>The note asset</a:t>
             </a:r>
           </a:p>
         </p:txBody>
@@ -8467,7 +8499,7 @@
                 </a:solidFill>
                 <a:latin typeface="Calibri"/>
               </a:rPr>
-              <a:t>•  one Multi-Purpose Token issuance per loan</a:t>
+              <a:t>•  one Multi-Purpose Token issuance per loan: the note's digital twin</a:t>
             </a:r>
           </a:p>
           <a:p>
@@ -8483,7 +8515,7 @@
                 </a:solidFill>
                 <a:latin typeface="Calibri"/>
               </a:rPr>
-              <a:t>•  supply = principal in cents, AssetScale 2</a:t>
+              <a:t>•  supply = face value in cents, held by the lender for 30 years</a:t>
             </a:r>
           </a:p>
           <a:p>
@@ -8499,7 +8531,7 @@
                 </a:solidFill>
                 <a:latin typeface="Calibri"/>
               </a:rPr>
-              <a:t>•  lock, clawback, escrow allowed; transfer never</a:t>
+              <a:t>•  CanEscrow + CanTransfer + CanLock + RequireAuth; never clawback</a:t>
             </a:r>
           </a:p>
           <a:p>
@@ -8515,7 +8547,7 @@
                 </a:solidFill>
                 <a:latin typeface="Calibri"/>
               </a:rPr>
-              <a:t>•  XLS-89d metadata: manifest hash + IPFS CID slot</a:t>
+              <a:t>•  XLS-89d metadata: fixed terms, manifest hash, IPFS CID slot</a:t>
             </a:r>
           </a:p>
         </p:txBody>
@@ -8677,7 +8709,7 @@
                 </a:solidFill>
                 <a:latin typeface="Calibri"/>
               </a:rPr>
-              <a:t>•  DepositAuth on the issuer and both custodial accounts</a:t>
+              <a:t>•  DepositAuth on the issuer, the lender and the impound account</a:t>
             </a:r>
           </a:p>
           <a:p>
@@ -8693,7 +8725,7 @@
                 </a:solidFill>
                 <a:latin typeface="Calibri"/>
               </a:rPr>
-              <a:t>•  DepositPreauth for the servicer and the borrower</a:t>
+              <a:t>•  DepositPreauth for the borrower and the counterparties</a:t>
             </a:r>
           </a:p>
           <a:p>
@@ -8709,7 +8741,7 @@
                 </a:solidFill>
                 <a:latin typeface="Calibri"/>
               </a:rPr>
-              <a:t>•  the borrower never pays the issuer</a:t>
+              <a:t>•  only authorized institutions can hold the asset</a:t>
             </a:r>
           </a:p>
           <a:p>
@@ -8725,7 +8757,7 @@
                 </a:solidFill>
                 <a:latin typeface="Calibri"/>
               </a:rPr>
-              <a:t>•  record locked while a period is unsettled</a:t>
+              <a:t>•  issuer can place a holding on hold and release it</a:t>
             </a:r>
           </a:p>
         </p:txBody>
@@ -8848,7 +8880,7 @@
                 </a:solidFill>
                 <a:latin typeface="Calibri"/>
               </a:rPr>
-              <a:t>Settlement</a:t>
+              <a:t>The payment rail</a:t>
             </a:r>
           </a:p>
         </p:txBody>
@@ -8887,7 +8919,7 @@
                 </a:solidFill>
                 <a:latin typeface="Calibri"/>
               </a:rPr>
-              <a:t>•  P&amp;I and impound legs as TokenEscrow of a settlement MPT</a:t>
+              <a:t>•  fixed P&amp;I and impound legs as TokenEscrow of a settlement MPT</a:t>
             </a:r>
           </a:p>
           <a:p>
@@ -8935,7 +8967,7 @@
                 </a:solidFill>
                 <a:latin typeface="Calibri"/>
               </a:rPr>
-              <a:t>•  monthly clawback: on-ledger balance == outstanding</a:t>
+              <a:t>•  each validated finish = on-chain proof of payment</a:t>
             </a:r>
           </a:p>
         </p:txBody>
@@ -9097,7 +9129,7 @@
                 </a:solidFill>
                 <a:latin typeface="Calibri"/>
               </a:rPr>
-              <a:t>•  PostgreSQL schema: loans, issuances, every tx with state</a:t>
+              <a:t>•  PostgreSQL: loans, issuances, 360-row schedule, every tx with state</a:t>
             </a:r>
           </a:p>
           <a:p>
@@ -9113,7 +9145,7 @@
                 </a:solidFill>
                 <a:latin typeface="Calibri"/>
               </a:rPr>
-              <a:t>•  Pending → Confirmed / Failed, full envelope</a:t>
+              <a:t>•  outstanding principal in the books, never on the ledger</a:t>
             </a:r>
           </a:p>
           <a:p>
@@ -9145,7 +9177,7 @@
                 </a:solidFill>
                 <a:latin typeface="Calibri"/>
               </a:rPr>
-              <a:t>•  reconciliation sweep, ledger vs books</a:t>
+              <a:t>•  audit sweep re-reads every payment proof from the ledger</a:t>
             </a:r>
           </a:p>
         </p:txBody>
@@ -9356,7 +9388,7 @@
                 </a:solidFill>
                 <a:latin typeface="Calibri"/>
               </a:rPr>
-              <a:t>High Tech Mortgage, Inc. · MortgageOS™ servicing layer v3.0.0 · XRPL Grants proposal · September 11, 2026 · github.com/vanfwilson/xrpl-mortgage-tokenizing-htm</a:t>
+              <a:t>High Tech Mortgage, Inc. · MortgageOS™ tokenization + servicing layer v3.1 · XRPL Grants proposal · September 11, 2026 · github.com/vanfwilson/xrpl-mortgage-tokenizing-htm</a:t>
             </a:r>
           </a:p>
         </p:txBody>
@@ -9474,7 +9506,7 @@
                 </a:solidFill>
                 <a:latin typeface="Calibri"/>
               </a:rPr>
-              <a:t>•  holds one non-transferable record of account per loan; its balance is the outstanding principal, reconciled to the books</a:t>
+              <a:t>•  holds one note asset per loan with the lending institution at face value: the right to the fixed P&amp;I cash flow, transferable only between authorized institutions</a:t>
             </a:r>
           </a:p>
           <a:p>
@@ -9490,7 +9522,7 @@
                 </a:solidFill>
                 <a:latin typeface="Calibri"/>
               </a:rPr>
-              <a:t>•  settles every P&amp;I and impound leg to the cent under a date lock, with the split in the memo and no personal data</a:t>
+              <a:t>•  settles every fixed P&amp;I and impound leg to the cent under a date lock, with the split in the memo and no personal data; each validated finish is a proof of payment</a:t>
             </a:r>
           </a:p>
           <a:p>
@@ -9506,7 +9538,7 @@
                 </a:solidFill>
                 <a:latin typeface="Calibri"/>
               </a:rPr>
-              <a:t>•  refuses payments from anyone not pre-authorized; freezes the record while a period is unsettled</a:t>
+              <a:t>•  refuses payments from anyone not pre-authorized; can place a holding on hold for a dispute</a:t>
             </a:r>
           </a:p>
           <a:p>
@@ -9522,7 +9554,7 @@
                 </a:solidFill>
                 <a:latin typeface="Calibri"/>
               </a:rPr>
-              <a:t>•  keeps every transaction, error code and timeout in an audit trail an examiner can open</a:t>
+              <a:t>•  keeps every transaction, proof, error code and timeout in an audit trail an examiner can open</a:t>
             </a:r>
           </a:p>
         </p:txBody>
@@ -9640,7 +9672,7 @@
                 </a:solidFill>
                 <a:latin typeface="Calibri"/>
               </a:rPr>
-              <a:t>•  decide what the borrower owes: the servicer's books in the bank's custodial accounts are authoritative</a:t>
+              <a:t>•  decide what the borrower owes: outstanding principal and the escrow analysis are the servicer's books</a:t>
             </a:r>
           </a:p>
           <a:p>
@@ -9672,7 +9704,7 @@
                 </a:solidFill>
                 <a:latin typeface="Calibri"/>
               </a:rPr>
-              <a:t>•  tokenize the note, sell interests in loans, or raise capital: the record has no CanTransfer flag</a:t>
+              <a:t>•  sell the asset to the public or raise capital; the borrower's consumer obligation is untouched by anything the lender does with it</a:t>
             </a:r>
           </a:p>
           <a:p>
@@ -9899,7 +9931,7 @@
                 </a:solidFill>
                 <a:latin typeface="Calibri"/>
               </a:rPr>
-              <a:t>High Tech Mortgage, Inc. · MortgageOS™ servicing layer v3.0.0 · XRPL Grants proposal · September 11, 2026 · github.com/vanfwilson/xrpl-mortgage-tokenizing-htm</a:t>
+              <a:t>High Tech Mortgage, Inc. · MortgageOS™ tokenization + servicing layer v3.1 · XRPL Grants proposal · September 11, 2026 · github.com/vanfwilson/xrpl-mortgage-tokenizing-htm</a:t>
             </a:r>
           </a:p>
         </p:txBody>
@@ -9932,13 +9964,13 @@
               </a:spcAft>
             </a:pPr>
             <a:r>
-              <a:rPr sz="1400">
+              <a:rPr sz="1300">
                 <a:solidFill>
                   <a:srgbClr val="0B2545"/>
                 </a:solidFill>
                 <a:latin typeface="Calibri"/>
               </a:rPr>
-              <a:t>•  Phase 1: DepositAuth and Preauth set and read back; record MPT minted with flags 0x4e (lock, require-auth, escrow, clawback; no transfer); servicer authorized and delivered 45,000,000 units; ledger issuance id equals the database row.</a:t>
+              <a:t>•  Phase 1: DepositAuth and Preauth set and read back; the note asset minted with CanEscrow, CanTransfer, CanLock, RequireAuth and no CanClawback, its metadata carrying the fixed terms; the lender authorized and delivered 45,000,000 units (face value); ledger issuance id equals the database row.</a:t>
             </a:r>
           </a:p>
           <a:p>
@@ -9948,13 +9980,13 @@
               </a:spcAft>
             </a:pPr>
             <a:r>
-              <a:rPr sz="1400">
+              <a:rPr sz="1300">
                 <a:solidFill>
                   <a:srgbClr val="0B2545"/>
                 </a:solidFill>
                 <a:latin typeface="Calibri"/>
               </a:rPr>
-              <a:t>•  Phase 2: schedule read from PostgreSQL; P&amp;I ($2,844.31) and impound ($655.21) legs escrowed with the split in the memo; record locked; both escrows finished on the due date with tesSUCCESS; $406.81 of principal clawed back; on-ledger balance 44,959,319 == database outstanding.</a:t>
+              <a:t>•  Phase 2: a strict fixed-rate schedule (identical P&amp;I for 360 periods) written to PostgreSQL; P&amp;I ($2,844.31, to the lender) and impound ($655.21) legs escrowed with the split in the memo; both finished on the due date with tesSUCCESS; books reduced by $406.81 while the on-ledger face value stayed 45,000,000; asset hold placed and released.</a:t>
             </a:r>
           </a:p>
           <a:p>
@@ -9964,13 +9996,13 @@
               </a:spcAft>
             </a:pPr>
             <a:r>
-              <a:rPr sz="1400">
+              <a:rPr sz="1300">
                 <a:solidFill>
                   <a:srgbClr val="0B2545"/>
                 </a:solidFill>
                 <a:latin typeface="Calibri"/>
               </a:rPr>
-              <a:t>•  Phase 3: a forced ledger error (tecPATH_PARTIAL) and a forced network timeout both caught, written to the audit log with the raw code and full envelope, engine exits cleanly.</a:t>
+              <a:t>•  Audit sweep: both finish transactions re-read from the ledger, validated tesSUCCESS, ledger index stamped on the payment rows.</a:t>
             </a:r>
           </a:p>
           <a:p>
@@ -9980,13 +10012,13 @@
               </a:spcAft>
             </a:pPr>
             <a:r>
-              <a:rPr sz="1400">
+              <a:rPr sz="1300">
                 <a:solidFill>
                   <a:srgbClr val="0B2545"/>
                 </a:solidFill>
                 <a:latin typeface="Calibri"/>
               </a:rPr>
-              <a:t>•  Independent evaluator re-ran the suite from a clean context: 12 of 12 criteria passed.</a:t>
+              <a:t>•  Phase 3: a forced ledger error (tecPATH_PARTIAL) and a forced network timeout both caught, written to the audit log with the raw code and full envelope, engine exits cleanly.</a:t>
             </a:r>
           </a:p>
         </p:txBody>
@@ -10072,7 +10104,7 @@
                           </a:solidFill>
                           <a:latin typeface="Calibri"/>
                         </a:rPr>
-                        <a:t>Confirmed transactions per run</a:t>
+                        <a:t>MPT issuances (note asset + settlement)</a:t>
                       </a:r>
                     </a:p>
                   </a:txBody>
@@ -10094,7 +10126,7 @@
                           </a:solidFill>
                           <a:latin typeface="Calibri"/>
                         </a:rPr>
-                        <a:t>17</a:t>
+                        <a:t>2</a:t>
                       </a:r>
                     </a:p>
                   </a:txBody>
@@ -10118,7 +10150,7 @@
                           </a:solidFill>
                           <a:latin typeface="Calibri"/>
                         </a:rPr>
-                        <a:t>MPT issuances (record + settlement)</a:t>
+                        <a:t>Note held by lender at face value</a:t>
                       </a:r>
                     </a:p>
                   </a:txBody>
@@ -10140,7 +10172,7 @@
                           </a:solidFill>
                           <a:latin typeface="Calibri"/>
                         </a:rPr>
-                        <a:t>2</a:t>
+                        <a:t>45,000,000 units</a:t>
                       </a:r>
                     </a:p>
                   </a:txBody>
@@ -10210,7 +10242,7 @@
                           </a:solidFill>
                           <a:latin typeface="Calibri"/>
                         </a:rPr>
-                        <a:t>Clawback = month-1 principal</a:t>
+                        <a:t>Payment proofs re-verified on-ledger</a:t>
                       </a:r>
                     </a:p>
                   </a:txBody>
@@ -10232,7 +10264,7 @@
                           </a:solidFill>
                           <a:latin typeface="Calibri"/>
                         </a:rPr>
-                        <a:t>40,681 units</a:t>
+                        <a:t>2 of 2</a:t>
                       </a:r>
                     </a:p>
                   </a:txBody>
@@ -10256,7 +10288,7 @@
                           </a:solidFill>
                           <a:latin typeface="Calibri"/>
                         </a:rPr>
-                        <a:t>Lock, unlock</a:t>
+                        <a:t>Asset hold, release</a:t>
                       </a:r>
                     </a:p>
                   </a:txBody>
@@ -10302,7 +10334,7 @@
                           </a:solidFill>
                           <a:latin typeface="Calibri"/>
                         </a:rPr>
-                        <a:t>Ledger balance = books</a:t>
+                        <a:t>Books after month 1</a:t>
                       </a:r>
                     </a:p>
                   </a:txBody>
@@ -10324,7 +10356,7 @@
                           </a:solidFill>
                           <a:latin typeface="Calibri"/>
                         </a:rPr>
-                        <a:t>44,959,319 = 44,959,319</a:t>
+                        <a:t>$449,593.19 (off-ledger)</a:t>
                       </a:r>
                     </a:p>
                   </a:txBody>
@@ -10461,7 +10493,7 @@
                 </a:solidFill>
                 <a:latin typeface="Calibri"/>
               </a:rPr>
-              <a:t>Only amendments live on Mainnet: MPTokensV1, TokenEscrow, Clawback, DepositAuth, DepositPreauth. Evidence: docs/evidence/v3/.</a:t>
+              <a:t>Only amendments live on Mainnet: MPTokensV1, TokenEscrow, DepositAuth, DepositPreauth. Evidence: docs/evidence/v3/. Hook firewall proven on Xahau: hooks/evidence/.</a:t>
             </a:r>
           </a:p>
         </p:txBody>
@@ -10672,7 +10704,7 @@
                 </a:solidFill>
                 <a:latin typeface="Calibri"/>
               </a:rPr>
-              <a:t>High Tech Mortgage, Inc. · MortgageOS™ servicing layer v3.0.0 · XRPL Grants proposal · September 11, 2026 · github.com/vanfwilson/xrpl-mortgage-tokenizing-htm</a:t>
+              <a:t>High Tech Mortgage, Inc. · MortgageOS™ tokenization + servicing layer v3.1 · XRPL Grants proposal · September 11, 2026 · github.com/vanfwilson/xrpl-mortgage-tokenizing-htm</a:t>
             </a:r>
           </a:p>
         </p:txBody>
@@ -10758,7 +10790,7 @@
                           </a:solidFill>
                           <a:latin typeface="Calibri"/>
                         </a:rPr>
-                        <a:t>Principal = record supply</a:t>
+                        <a:t>Note face value = token supply, constant</a:t>
                       </a:r>
                     </a:p>
                   </a:txBody>
@@ -10804,7 +10836,7 @@
                           </a:solidFill>
                           <a:latin typeface="Calibri"/>
                         </a:rPr>
-                        <a:t>P&amp;I, fixed for the life of the loan</a:t>
+                        <a:t>P&amp;I, identical every month</a:t>
                       </a:r>
                     </a:p>
                   </a:txBody>
@@ -11034,7 +11066,7 @@
                           </a:solidFill>
                           <a:latin typeface="Calibri"/>
                         </a:rPr>
-                        <a:t>Outstanding after month 1</a:t>
+                        <a:t>Outstanding after month 1 (books only)</a:t>
                       </a:r>
                     </a:p>
                   </a:txBody>
@@ -11056,7 +11088,7 @@
                           </a:solidFill>
                           <a:latin typeface="Calibri"/>
                         </a:rPr>
-                        <a:t>$449,593.19 = 44,959,319 units</a:t>
+                        <a:t>$449,593.19</a:t>
                       </a:r>
                     </a:p>
                   </a:txBody>
@@ -11105,7 +11137,7 @@
                 </a:solidFill>
                 <a:latin typeface="Calibri"/>
               </a:rPr>
-              <a:t>•  RESPA 12 CFR 1024.17: impounds are one-twelfth of the last actual annual bill; a bill above what was collected is advanced by the servicer and recovered at the next analysis.</a:t>
+              <a:t>•  Strict 30-year fixed framework: the payment is rounded up to the cent and every period is identical; the schedule builder refuses anything else.</a:t>
             </a:r>
           </a:p>
           <a:p>
@@ -11121,7 +11153,7 @@
                 </a:solidFill>
                 <a:latin typeface="Calibri"/>
               </a:rPr>
-              <a:t>•  The borrower escrows both legs; each escrow cannot be finished before its due date on the ledger itself.</a:t>
+              <a:t>•  RESPA 12 CFR 1024.17: impounds are one-twelfth of the last actual annual bill; a bill above what was collected is advanced by the servicer and recovered at the next analysis.</a:t>
             </a:r>
           </a:p>
           <a:p>
@@ -11137,7 +11169,7 @@
                 </a:solidFill>
                 <a:latin typeface="Calibri"/>
               </a:rPr>
-              <a:t>•  After settlement the issuer claws back exactly the principal portion, so the record's balance is the outstanding principal, and the reconciliation sweep proves it against the books.</a:t>
+              <a:t>•  The borrower escrows both legs; each escrow cannot be finished before its due date on the ledger itself, and each validated finish is the proof of payment.</a:t>
             </a:r>
           </a:p>
           <a:p>
@@ -11153,7 +11185,7 @@
                 </a:solidFill>
                 <a:latin typeface="Calibri"/>
               </a:rPr>
-              <a:t>•  The offline test checks the payment against the closed-form annuity to the cent and that 360 principal portions sum to the principal exactly.</a:t>
+              <a:t>•  The note asset never changes: amortization is a servicing figure in the books, so a holder's position is exactly what the ledger says it is.</a:t>
             </a:r>
           </a:p>
         </p:txBody>
@@ -11364,7 +11396,7 @@
                 </a:solidFill>
                 <a:latin typeface="Calibri"/>
               </a:rPr>
-              <a:t>High Tech Mortgage, Inc. · MortgageOS™ servicing layer v3.0.0 · XRPL Grants proposal · September 11, 2026 · github.com/vanfwilson/xrpl-mortgage-tokenizing-htm</a:t>
+              <a:t>High Tech Mortgage, Inc. · MortgageOS™ tokenization + servicing layer v3.1 · XRPL Grants proposal · September 11, 2026 · github.com/vanfwilson/xrpl-mortgage-tokenizing-htm</a:t>
             </a:r>
           </a:p>
         </p:txBody>
@@ -11563,7 +11595,7 @@
                           </a:solidFill>
                           <a:latin typeface="Calibri"/>
                         </a:rPr>
-                        <a:t>record lock and audit trail as the evidence base</a:t>
+                        <a:t>payment proofs and audit trail as the evidence base; asset hold for disputes</a:t>
                       </a:r>
                     </a:p>
                   </a:txBody>
@@ -12045,7 +12077,7 @@
                 </a:solidFill>
                 <a:latin typeface="Calibri"/>
               </a:rPr>
-              <a:t>High Tech Mortgage, Inc. · MortgageOS™ servicing layer v3.0.0 · XRPL Grants proposal · September 11, 2026 · github.com/vanfwilson/xrpl-mortgage-tokenizing-htm</a:t>
+              <a:t>High Tech Mortgage, Inc. · MortgageOS™ tokenization + servicing layer v3.1 · XRPL Grants proposal · September 11, 2026 · github.com/vanfwilson/xrpl-mortgage-tokenizing-htm</a:t>
             </a:r>
           </a:p>
         </p:txBody>
@@ -12116,7 +12148,7 @@
                 </a:solidFill>
                 <a:latin typeface="Calibri"/>
               </a:rPr>
-              <a:t>•  Postgres is authoritative; the ledger is evidence. A sweep compares outstanding principal to the on-ledger balance; a mismatch is an incident, not a silent state.</a:t>
+              <a:t>•  Postgres is authoritative for servicing; the ledger is evidence. The audit sweep re-reads every payment proof from the ledger and checks the lender still holds the note at face value; a miss is an incident, not a silent state.</a:t>
             </a:r>
           </a:p>
           <a:p>
@@ -12266,7 +12298,7 @@
                 </a:solidFill>
                 <a:latin typeface="Calibri"/>
               </a:rPr>
-              <a:t>•  mortgageos.escrow_legs: owner, destination, units, FinishAfter, create and finish hashes, status</a:t>
+              <a:t>•  mortgageos.escrow_legs: owner, destination, units, FinishAfter, create and finish hashes, proof ledger index and verification time</a:t>
             </a:r>
           </a:p>
           <a:p>
@@ -12509,7 +12541,7 @@
                 </a:solidFill>
                 <a:latin typeface="Calibri"/>
               </a:rPr>
-              <a:t>High Tech Mortgage, Inc. · MortgageOS™ servicing layer v3.0.0 · XRPL Grants proposal · September 11, 2026 · github.com/vanfwilson/xrpl-mortgage-tokenizing-htm</a:t>
+              <a:t>High Tech Mortgage, Inc. · MortgageOS™ tokenization + servicing layer v3.1 · XRPL Grants proposal · September 11, 2026 · github.com/vanfwilson/xrpl-mortgage-tokenizing-htm</a:t>
             </a:r>
           </a:p>
         </p:txBody>
@@ -12595,7 +12627,7 @@
                           </a:solidFill>
                           <a:latin typeface="Calibri"/>
                         </a:rPr>
-                        <a:t>Transactions (7 per month + boarding)</a:t>
+                        <a:t>Transactions (4 per month + boarding)</a:t>
                       </a:r>
                     </a:p>
                   </a:txBody>
@@ -12617,7 +12649,7 @@
                           </a:solidFill>
                           <a:latin typeface="Calibri"/>
                         </a:rPr>
-                        <a:t>about 90</a:t>
+                        <a:t>about 55</a:t>
                       </a:r>
                     </a:p>
                   </a:txBody>
@@ -12663,7 +12695,7 @@
                           </a:solidFill>
                           <a:latin typeface="Calibri"/>
                         </a:rPr>
-                        <a:t>about 900 drops</a:t>
+                        <a:t>about 550 drops</a:t>
                       </a:r>
                     </a:p>
                   </a:txBody>
